--- a/Sem 6_ V2_Badminton/Badminton Swing Analyzer using MPU6050 with ML.pptx
+++ b/Sem 6_ V2_Badminton/Badminton Swing Analyzer using MPU6050 with ML.pptx
@@ -292,7 +292,7 @@
               <a:pPr>
                 <a:defRPr/>
               </a:pPr>
-              <a:t>8/21/2026</a:t>
+              <a:t>9/21/2026</a:t>
             </a:fld>
             <a:endParaRPr lang="en-US" dirty="0"/>
           </a:p>
@@ -4360,7 +4360,7 @@
                 </a:spcBef>
                 <a:defRPr/>
               </a:pPr>
-              <a:t>21 August 2026</a:t>
+              <a:t>21 September 2026</a:t>
             </a:fld>
             <a:endParaRPr lang="en-US" sz="1200" dirty="0">
               <a:solidFill>
